--- a/Final_Revision/Exam_Practice/FR-L04_Writing_Workshop_Education_Work_and_the_International_World.pptx
+++ b/Final_Revision/Exam_Practice/FR-L04_Writing_Workshop_Education_Work_and_the_International_World.pptx
@@ -784,7 +784,11 @@
           <a:lstStyle/>
           <a:p>
             <a:r>
-              <a:rPr lang="en-US" dirty="0"/>
+              <a:rPr lang="ar-SA" dirty="0">
+                <a:latin typeface="Amiri" pitchFamily="2" charset="-78"/>
+                <a:ea typeface="Amiri" pitchFamily="2" charset="-78"/>
+                <a:cs typeface="Amiri" pitchFamily="2" charset="-78"/>
+              </a:rPr>
               <a:t>Q3 (3 min to choose and read). Title (أ) suits Core and Develop; title (ب) suits Stretch.</a:t>
             </a:r>
             <a:endParaRPr lang="en-US" dirty="0"/>
@@ -1403,7 +1407,11 @@
           <a:lstStyle/>
           <a:p>
             <a:r>
-              <a:rPr lang="en-US" dirty="0"/>
+              <a:rPr lang="ar-SA" dirty="0">
+                <a:latin typeface="Amiri" pitchFamily="2" charset="-78"/>
+                <a:ea typeface="Amiri" pitchFamily="2" charset="-78"/>
+                <a:cs typeface="Amiri" pitchFamily="2" charset="-78"/>
+              </a:rPr>
               <a:t>WELCOME (1 min) — while students join.
 • Greet each student by name as they arrive: السَّلَامُ عَلَيْكُمْ. Take the register (Pastoral Tracker: attendance 0/1).
 • 2-MINUTE CHECK-IN (SEND training): a private chat to any student who seemed unsettled last lesson — “Are you okay today? 👍 / 👎”.
@@ -1672,7 +1680,11 @@
           <a:lstStyle/>
           <a:p>
             <a:r>
-              <a:rPr lang="en-US" dirty="0"/>
+              <a:rPr lang="ar-SA" dirty="0">
+                <a:latin typeface="Amiri" pitchFamily="2" charset="-78"/>
+                <a:ea typeface="Amiri" pitchFamily="2" charset="-78"/>
+                <a:cs typeface="Amiri" pitchFamily="2" charset="-78"/>
+              </a:rPr>
               <a:t>QUESTION 1 — FORM FILLING. About 8 minutes. Core: boxes 1–6. Develop / Stretch: all 8. Boxes recycle Topic D (job, qualities, experience) and Topic E (languages, cultures). A boy writes مُوَظَّفُ اسْتِقْبَالٍ · مُنَظَّمٌ وَصَبُورٌ and reads تُنَاسِبُكَ.</a:t>
             </a:r>
             <a:endParaRPr lang="en-US" dirty="0"/>
@@ -1936,7 +1948,11 @@
           <a:lstStyle/>
           <a:p>
             <a:r>
-              <a:rPr lang="en-US" dirty="0"/>
+              <a:rPr lang="ar-SA" dirty="0">
+                <a:latin typeface="Amiri" pitchFamily="2" charset="-78"/>
+                <a:ea typeface="Amiri" pitchFamily="2" charset="-78"/>
+                <a:cs typeface="Amiri" pitchFamily="2" charset="-78"/>
+              </a:rPr>
               <a:t>Question words: أَيْنَ (where) · مَا سَاعَاتُ (what hours → مِنَ … إِلَى …) · مَنْ زُمَلَاؤُكِ (who → nisba) · مَاذَا حَدَثَ (PAST) · خِطَطُكِ (FUTURE).</a:t>
             </a:r>
             <a:endParaRPr lang="en-US" dirty="0"/>
@@ -2508,6 +2524,7 @@
                   <a:srgbClr val="D4AF37"/>
                 </a:solidFill>
                 <a:latin typeface="Amiri" pitchFamily="2" charset="-78"/>
+                <a:ea typeface="Amiri" pitchFamily="2" charset="-78"/>
                 <a:cs typeface="Amiri" pitchFamily="2" charset="-78"/>
               </a:rPr>
               <a:t>م</a:t>
@@ -2714,6 +2731,7 @@
                   <a:srgbClr val="D4AF37"/>
                 </a:solidFill>
                 <a:latin typeface="Amiri" pitchFamily="2" charset="-78"/>
+                <a:ea typeface="Amiri" pitchFamily="2" charset="-78"/>
                 <a:cs typeface="Amiri" pitchFamily="2" charset="-78"/>
               </a:rPr>
               <a:t>وَرْشَةُ الكِتَابَةِ — التَّعْلِيمُ وَالعَمَلُ وَالعَالَمُ الدُّوَلِيُّ</a:t>
@@ -3171,6 +3189,7 @@
                   <a:srgbClr val="D4AF37"/>
                 </a:solidFill>
                 <a:latin typeface="Amiri" pitchFamily="2" charset="-78"/>
+                <a:ea typeface="Amiri" pitchFamily="2" charset="-78"/>
                 <a:cs typeface="Amiri" pitchFamily="2" charset="-78"/>
               </a:rPr>
               <a:t>م</a:t>
@@ -3491,6 +3510,7 @@
                   <a:srgbClr val="8A6D1E"/>
                 </a:solidFill>
                 <a:latin typeface="Amiri" pitchFamily="2" charset="-78"/>
+                <a:ea typeface="Amiri" pitchFamily="2" charset="-78"/>
                 <a:cs typeface="Amiri" pitchFamily="2" charset="-78"/>
               </a:rPr>
               <a:t>نَمُوذَجُ الإِجَابَةِ</a:t>
@@ -3604,6 +3624,7 @@
                   <a:srgbClr val="1F2A37"/>
                 </a:solidFill>
                 <a:latin typeface="Amiri" pitchFamily="2" charset="-78"/>
+                <a:ea typeface="Amiri" pitchFamily="2" charset="-78"/>
                 <a:cs typeface="Amiri" pitchFamily="2" charset="-78"/>
               </a:rPr>
               <a:t>مَرْحَبًا يَا هَالَةُ،</a:t>
@@ -3623,6 +3644,7 @@
                   <a:srgbClr val="1F2A37"/>
                 </a:solidFill>
                 <a:latin typeface="Amiri" pitchFamily="2" charset="-78"/>
+                <a:ea typeface="Amiri" pitchFamily="2" charset="-78"/>
                 <a:cs typeface="Amiri" pitchFamily="2" charset="-78"/>
               </a:rPr>
               <a:t>كَيْفَ حَالُكِ؟ أَنَا الآنَ فِي أُسْبُوعِ خِبْرَةِ العَمَلِ فِي المَرْكَزِ الثَّقَافِيِّ العَرَبِيِّ فِي لَنْدَنَ! أَعْمَلُ مِنَ التَّاسِعَةِ إِلَى الثَّالِثَةِ. أُسَاعِدُ فِي الاسْتِقْبَالِ، وَأُتَرْجِمُ لِلزُّوَّارِ مِنَ العَرَبِيَّةِ إِلَى الإِنْجْلِيزِيَّةِ. زُمَلَائِي مِنْ مِصْرَ وَالمَغْرِبِ وَبَرِيطَانْيَا، وَهُمْ لُطَفَاءُ جِدًّا. أَمْسِ نَظَّمْنَا أُمْسِيَةً لِلشِّعْرِ العَرَبِيِّ، وَحَضَرَهَا خَمْسُونَ شَخْصًا. العَمَلُ مُتْعِبٌ، وَمَعَ ذٰلِكَ أُحِبُّهُ كَثِيرًا، لِأَنِّي أَسْتَخْدِمُ لُغَتَيَّ. فِي المُسْتَقْبَلِ أُرِيدُ أَنْ أَعْمَلَ مُتَرْجِمَةً. وَأَنْتِ، أَيْنَ سَتَعْمَلِينَ فِي خِبْرَةِ العَمَلِ؟</a:t>
@@ -3642,6 +3664,7 @@
                   <a:srgbClr val="1F2A37"/>
                 </a:solidFill>
                 <a:latin typeface="Amiri" pitchFamily="2" charset="-78"/>
+                <a:ea typeface="Amiri" pitchFamily="2" charset="-78"/>
                 <a:cs typeface="Amiri" pitchFamily="2" charset="-78"/>
               </a:rPr>
               <a:t>مَعَ السَّلَامَةِ،</a:t>
@@ -3661,6 +3684,7 @@
                   <a:srgbClr val="1F2A37"/>
                 </a:solidFill>
                 <a:latin typeface="Amiri" pitchFamily="2" charset="-78"/>
+                <a:ea typeface="Amiri" pitchFamily="2" charset="-78"/>
                 <a:cs typeface="Amiri" pitchFamily="2" charset="-78"/>
               </a:rPr>
               <a:t>رُقَيَّةُ</a:t>
@@ -3824,11 +3848,12 @@
               <a:buNone/>
             </a:pPr>
             <a:r>
-              <a:rPr lang="en-US" sz="950" b="1" dirty="0">
+              <a:rPr lang="ar-SA" sz="950" b="1" dirty="0">
                 <a:solidFill>
                   <a:srgbClr val="FFFFFF"/>
                 </a:solidFill>
                 <a:latin typeface="Calibri" pitchFamily="34" charset="0"/>
+                <a:ea typeface="Amiri" pitchFamily="2" charset="-78"/>
                 <a:cs typeface="Amiri" pitchFamily="2" charset="-78"/>
               </a:rPr>
               <a:t>أَعْمَلُ مِنَ التَّاسِعَةِ</a:t>
@@ -3889,11 +3914,12 @@
               <a:buNone/>
             </a:pPr>
             <a:r>
-              <a:rPr lang="en-US" sz="950" b="1" dirty="0">
+              <a:rPr lang="ar-SA" sz="950" b="1" dirty="0">
                 <a:solidFill>
                   <a:srgbClr val="FFFFFF"/>
                 </a:solidFill>
                 <a:latin typeface="Calibri" pitchFamily="34" charset="0"/>
+                <a:ea typeface="Amiri" pitchFamily="2" charset="-78"/>
                 <a:cs typeface="Amiri" pitchFamily="2" charset="-78"/>
               </a:rPr>
               <a:t>زُمَلَائِي مِنْ مِصْرَ</a:t>
@@ -3954,11 +3980,12 @@
               <a:buNone/>
             </a:pPr>
             <a:r>
-              <a:rPr lang="en-US" sz="950" b="1" dirty="0">
+              <a:rPr lang="ar-SA" sz="950" b="1" dirty="0">
                 <a:solidFill>
                   <a:srgbClr val="FFFFFF"/>
                 </a:solidFill>
                 <a:latin typeface="Calibri" pitchFamily="34" charset="0"/>
+                <a:ea typeface="Amiri" pitchFamily="2" charset="-78"/>
                 <a:cs typeface="Amiri" pitchFamily="2" charset="-78"/>
               </a:rPr>
               <a:t>وَمَعَ ذٰلِكَ أُحِبُّهُ</a:t>
@@ -4019,11 +4046,12 @@
               <a:buNone/>
             </a:pPr>
             <a:r>
-              <a:rPr lang="en-US" sz="950" b="1" dirty="0">
+              <a:rPr lang="ar-SA" sz="950" b="1" dirty="0">
                 <a:solidFill>
                   <a:srgbClr val="FFFFFF"/>
                 </a:solidFill>
                 <a:latin typeface="Calibri" pitchFamily="34" charset="0"/>
+                <a:ea typeface="Amiri" pitchFamily="2" charset="-78"/>
                 <a:cs typeface="Amiri" pitchFamily="2" charset="-78"/>
               </a:rPr>
               <a:t>أُرِيدُ أَنْ أَعْمَلَ مُتَرْجِمَةً</a:t>
@@ -4157,6 +4185,7 @@
                   <a:srgbClr val="D4AF37"/>
                 </a:solidFill>
                 <a:latin typeface="Amiri" pitchFamily="2" charset="-78"/>
+                <a:ea typeface="Amiri" pitchFamily="2" charset="-78"/>
                 <a:cs typeface="Amiri" pitchFamily="2" charset="-78"/>
               </a:rPr>
               <a:t>م</a:t>
@@ -4477,6 +4506,7 @@
                   <a:srgbClr val="8A6D1E"/>
                 </a:solidFill>
                 <a:latin typeface="Amiri" pitchFamily="2" charset="-78"/>
+                <a:ea typeface="Amiri" pitchFamily="2" charset="-78"/>
                 <a:cs typeface="Amiri" pitchFamily="2" charset="-78"/>
               </a:rPr>
               <a:t>نَمُوذَجُ الإِجَابَةِ</a:t>
@@ -4590,6 +4620,7 @@
                   <a:srgbClr val="1F2A37"/>
                 </a:solidFill>
                 <a:latin typeface="Amiri" pitchFamily="2" charset="-78"/>
+                <a:ea typeface="Amiri" pitchFamily="2" charset="-78"/>
                 <a:cs typeface="Amiri" pitchFamily="2" charset="-78"/>
               </a:rPr>
               <a:t>عَزِيزَتِي هَالَةُ،</a:t>
@@ -4609,6 +4640,7 @@
                   <a:srgbClr val="1F2A37"/>
                 </a:solidFill>
                 <a:latin typeface="Amiri" pitchFamily="2" charset="-78"/>
+                <a:ea typeface="Amiri" pitchFamily="2" charset="-78"/>
                 <a:cs typeface="Amiri" pitchFamily="2" charset="-78"/>
               </a:rPr>
               <a:t>أَكْتُبُ إِلَيْكِ فِي نِهَايَةِ أُسْبُوعِي الأَوَّلِ مِنْ خِبْرَةِ العَمَلِ فِي المَرْكَزِ الثَّقَافِيِّ العَرَبِيِّ، وَهُوَ أُسْبُوعٌ لَمْ أَتَوَقَّعْ أَنْ يَكُونَ بِهٰذَا الغِنَى! فَبَيْنَمَا كُنْتُ أَظُنُّ أَنَّنِي سَأُرَتِّبُ الأَوْرَاقَ فَقَطْ، طَلَبَ مِنِّي المُدِيرُ أَنْ أُتَرْجِمَ لِلزُّوَّارِ، وَأَنْ أُسَاعِدَ فِي تَنْظِيمِ أُمْسِيَةٍ لِلشِّعْرِ حَضَرَهَا خَمْسُونَ شَخْصًا. أَمَّا زُمَلَائِي فَمِنْ أَرْبَعِ جِنْسِيَّاتٍ، وَتَعَلَّمْتُ مِنْهُمْ أَنَّ الاحْتِرَامَ وَالدِّقَّةَ لُغَةٌ يَفْهَمُهَا الجَمِيعُ. صَحِيحٌ أَنَّ اليَوْمَ طَوِيلٌ، غَيْرَ أَنَّ هٰذِهِ التَّجْرِبَةَ أَكَّدَتْ لِي أَنَّ التَّرْجَمَةَ هِيَ المِهْنَةُ الَّتِي أُرِيدُهَا. وَإِذَا قُبِلْتُ فِي الجَامِعَةِ، فَسَأَدْرُسُ اللُّغَاتِ وَالتَّرْجَمَةَ. أَخْبِرِينِي: أَيْنَ قَضَيْتِ أُسْبُوعَكِ؟</a:t>
@@ -4628,6 +4660,7 @@
                   <a:srgbClr val="1F2A37"/>
                 </a:solidFill>
                 <a:latin typeface="Amiri" pitchFamily="2" charset="-78"/>
+                <a:ea typeface="Amiri" pitchFamily="2" charset="-78"/>
                 <a:cs typeface="Amiri" pitchFamily="2" charset="-78"/>
               </a:rPr>
               <a:t>بِمَحَبَّةٍ،</a:t>
@@ -4647,6 +4680,7 @@
                   <a:srgbClr val="1F2A37"/>
                 </a:solidFill>
                 <a:latin typeface="Amiri" pitchFamily="2" charset="-78"/>
+                <a:ea typeface="Amiri" pitchFamily="2" charset="-78"/>
                 <a:cs typeface="Amiri" pitchFamily="2" charset="-78"/>
               </a:rPr>
               <a:t>رُقَيَّةُ</a:t>
@@ -4810,11 +4844,12 @@
               <a:buNone/>
             </a:pPr>
             <a:r>
-              <a:rPr lang="en-US" sz="950" b="1" dirty="0">
+              <a:rPr lang="ar-SA" sz="950" b="1" dirty="0">
                 <a:solidFill>
                   <a:srgbClr val="FFFFFF"/>
                 </a:solidFill>
                 <a:latin typeface="Calibri" pitchFamily="34" charset="0"/>
+                <a:ea typeface="Amiri" pitchFamily="2" charset="-78"/>
                 <a:cs typeface="Amiri" pitchFamily="2" charset="-78"/>
               </a:rPr>
               <a:t>لَمْ أَتَوَقَّعْ أَنْ</a:t>
@@ -4875,11 +4910,12 @@
               <a:buNone/>
             </a:pPr>
             <a:r>
-              <a:rPr lang="en-US" sz="950" b="1" dirty="0">
+              <a:rPr lang="ar-SA" sz="950" b="1" dirty="0">
                 <a:solidFill>
                   <a:srgbClr val="FFFFFF"/>
                 </a:solidFill>
                 <a:latin typeface="Calibri" pitchFamily="34" charset="0"/>
+                <a:ea typeface="Amiri" pitchFamily="2" charset="-78"/>
                 <a:cs typeface="Amiri" pitchFamily="2" charset="-78"/>
               </a:rPr>
               <a:t>فَبَيْنَمَا كُنْتُ أَظُنُّ</a:t>
@@ -4940,11 +4976,12 @@
               <a:buNone/>
             </a:pPr>
             <a:r>
-              <a:rPr lang="en-US" sz="950" b="1" dirty="0">
+              <a:rPr lang="ar-SA" sz="950" b="1" dirty="0">
                 <a:solidFill>
                   <a:srgbClr val="FFFFFF"/>
                 </a:solidFill>
                 <a:latin typeface="Calibri" pitchFamily="34" charset="0"/>
+                <a:ea typeface="Amiri" pitchFamily="2" charset="-78"/>
                 <a:cs typeface="Amiri" pitchFamily="2" charset="-78"/>
               </a:rPr>
               <a:t>لُغَةٌ يَفْهَمُهَا الجَمِيعُ</a:t>
@@ -5005,11 +5042,12 @@
               <a:buNone/>
             </a:pPr>
             <a:r>
-              <a:rPr lang="en-US" sz="950" b="1" dirty="0">
+              <a:rPr lang="ar-SA" sz="950" b="1" dirty="0">
                 <a:solidFill>
                   <a:srgbClr val="FFFFFF"/>
                 </a:solidFill>
                 <a:latin typeface="Calibri" pitchFamily="34" charset="0"/>
+                <a:ea typeface="Amiri" pitchFamily="2" charset="-78"/>
                 <a:cs typeface="Amiri" pitchFamily="2" charset="-78"/>
               </a:rPr>
               <a:t>إِذَا قُبِلْتُ … فَسَأَدْرُسُ</a:t>
@@ -5143,6 +5181,7 @@
                   <a:srgbClr val="D4AF37"/>
                 </a:solidFill>
                 <a:latin typeface="Amiri" pitchFamily="2" charset="-78"/>
+                <a:ea typeface="Amiri" pitchFamily="2" charset="-78"/>
                 <a:cs typeface="Amiri" pitchFamily="2" charset="-78"/>
               </a:rPr>
               <a:t>م</a:t>
@@ -5463,6 +5502,7 @@
                   <a:srgbClr val="8A6D1E"/>
                 </a:solidFill>
                 <a:latin typeface="Amiri" pitchFamily="2" charset="-78"/>
+                <a:ea typeface="Amiri" pitchFamily="2" charset="-78"/>
                 <a:cs typeface="Amiri" pitchFamily="2" charset="-78"/>
               </a:rPr>
               <a:t>اخْتَرْ عُنْوَانًا وَاحِدًا</a:t>
@@ -5743,6 +5783,7 @@
                   <a:srgbClr val="1B3B6F"/>
                 </a:solidFill>
                 <a:latin typeface="Amiri" pitchFamily="2" charset="-78"/>
+                <a:ea typeface="Amiri" pitchFamily="2" charset="-78"/>
                 <a:cs typeface="Amiri" pitchFamily="2" charset="-78"/>
               </a:rPr>
               <a:t>مُسْتَقْبَلِي: الدِّرَاسَةُ وَاللُّغَاتُ وَالعَمَلُ</a:t>
@@ -5781,6 +5822,7 @@
                   <a:srgbClr val="1B3B6F"/>
                 </a:solidFill>
                 <a:latin typeface="Amiri" pitchFamily="2" charset="-78"/>
+                <a:ea typeface="Amiri" pitchFamily="2" charset="-78"/>
                 <a:cs typeface="Amiri" pitchFamily="2" charset="-78"/>
               </a:rPr>
               <a:t>(أ)</a:t>
@@ -5887,6 +5929,7 @@
                   <a:srgbClr val="1B3B6F"/>
                 </a:solidFill>
                 <a:latin typeface="Amiri" pitchFamily="2" charset="-78"/>
+                <a:ea typeface="Amiri" pitchFamily="2" charset="-78"/>
                 <a:cs typeface="Amiri" pitchFamily="2" charset="-78"/>
               </a:rPr>
               <a:t>دِرَاسَتُكَ الآنَ وَمَوَادُّكَ · اللُّغَاتُ وَالثَّقَافَاتُ فِي حَيَاتِكَ · تَجْرِبَةُ عَمَلٍ أَوْ سَفَرٍ · طُمُوحَاتُكَ وَخُطَّتُكَ البَدِيلَةُ</a:t>
@@ -6018,6 +6061,7 @@
                   <a:srgbClr val="1B3B6F"/>
                 </a:solidFill>
                 <a:latin typeface="Amiri" pitchFamily="2" charset="-78"/>
+                <a:ea typeface="Amiri" pitchFamily="2" charset="-78"/>
                 <a:cs typeface="Amiri" pitchFamily="2" charset="-78"/>
               </a:rPr>
               <a:t>هَلْ يَحْتَاجُ كُلُّ طَالِبٍ إِلَى لُغَتَيْنِ لِيَنْجَحَ فِي العَمَلِ؟</a:t>
@@ -6056,6 +6100,7 @@
                   <a:srgbClr val="1B3B6F"/>
                 </a:solidFill>
                 <a:latin typeface="Amiri" pitchFamily="2" charset="-78"/>
+                <a:ea typeface="Amiri" pitchFamily="2" charset="-78"/>
                 <a:cs typeface="Amiri" pitchFamily="2" charset="-78"/>
               </a:rPr>
               <a:t>(ب)</a:t>
@@ -6159,6 +6204,7 @@
                   <a:srgbClr val="1B3B6F"/>
                 </a:solidFill>
                 <a:latin typeface="Amiri" pitchFamily="2" charset="-78"/>
+                <a:ea typeface="Amiri" pitchFamily="2" charset="-78"/>
                 <a:cs typeface="Amiri" pitchFamily="2" charset="-78"/>
               </a:rPr>
               <a:t>المَوْضُوعُ · فَوَائِدُ اللُّغَاتِ وَالآرَاءُ الأُخْرَى · مِثَالٌ مِنْ تَجْرِبَتِكَ · رَأْيُكَ</a:t>
@@ -6358,6 +6404,7 @@
                   <a:srgbClr val="D4AF37"/>
                 </a:solidFill>
                 <a:latin typeface="Amiri" pitchFamily="2" charset="-78"/>
+                <a:ea typeface="Amiri" pitchFamily="2" charset="-78"/>
                 <a:cs typeface="Amiri" pitchFamily="2" charset="-78"/>
               </a:rPr>
               <a:t>م</a:t>
@@ -6678,6 +6725,7 @@
                   <a:srgbClr val="8A6D1E"/>
                 </a:solidFill>
                 <a:latin typeface="Amiri" pitchFamily="2" charset="-78"/>
+                <a:ea typeface="Amiri" pitchFamily="2" charset="-78"/>
                 <a:cs typeface="Amiri" pitchFamily="2" charset="-78"/>
               </a:rPr>
               <a:t>خُطَّةُ الكِتَابَةِ</a:t>
@@ -7302,6 +7350,7 @@
                   <a:srgbClr val="1B3B6F"/>
                 </a:solidFill>
                 <a:latin typeface="Amiri" pitchFamily="2" charset="-78"/>
+                <a:ea typeface="Amiri" pitchFamily="2" charset="-78"/>
                 <a:cs typeface="Amiri" pitchFamily="2" charset="-78"/>
               </a:rPr>
               <a:t>أَدْرُسُ تِسْعَ مَوَادَّ، وَأُرَاجِعُ كُلَّ يَوْمٍ.</a:t>
@@ -7401,6 +7450,7 @@
                   <a:srgbClr val="1B3B6F"/>
                 </a:solidFill>
                 <a:latin typeface="Amiri" pitchFamily="2" charset="-78"/>
+                <a:ea typeface="Amiri" pitchFamily="2" charset="-78"/>
                 <a:cs typeface="Amiri" pitchFamily="2" charset="-78"/>
               </a:rPr>
               <a:t>كُنْتُ أُتَرْجِمُ لِلزُّوَّارِ فِي المَرْكَزِ.</a:t>
@@ -7500,6 +7550,7 @@
                   <a:srgbClr val="1B3B6F"/>
                 </a:solidFill>
                 <a:latin typeface="Amiri" pitchFamily="2" charset="-78"/>
+                <a:ea typeface="Amiri" pitchFamily="2" charset="-78"/>
                 <a:cs typeface="Amiri" pitchFamily="2" charset="-78"/>
               </a:rPr>
               <a:t>أَطْمَحُ إِلَى أَنْ أَعْمَلَ مُتَرْجِمَةً.</a:t>
@@ -7661,6 +7712,7 @@
                   <a:srgbClr val="1F2A37"/>
                 </a:solidFill>
                 <a:latin typeface="Amiri" pitchFamily="2" charset="-78"/>
+                <a:ea typeface="Amiri" pitchFamily="2" charset="-78"/>
                 <a:cs typeface="Amiri" pitchFamily="2" charset="-78"/>
               </a:rPr>
               <a:t>أ</a:t>
@@ -7687,6 +7739,7 @@
                   <a:srgbClr val="1F2A37"/>
                 </a:solidFill>
                 <a:latin typeface="Amiri" pitchFamily="2" charset="-78"/>
+                <a:ea typeface="Amiri" pitchFamily="2" charset="-78"/>
                 <a:cs typeface="Amiri" pitchFamily="2" charset="-78"/>
               </a:rPr>
               <a:t>ب</a:t>
@@ -7833,6 +7886,7 @@
                   <a:srgbClr val="D4AF37"/>
                 </a:solidFill>
                 <a:latin typeface="Amiri" pitchFamily="2" charset="-78"/>
+                <a:ea typeface="Amiri" pitchFamily="2" charset="-78"/>
                 <a:cs typeface="Amiri" pitchFamily="2" charset="-78"/>
               </a:rPr>
               <a:t>م</a:t>
@@ -8090,6 +8144,7 @@
                   <a:srgbClr val="8A6D1E"/>
                 </a:solidFill>
                 <a:latin typeface="Amiri" pitchFamily="2" charset="-78"/>
+                <a:ea typeface="Amiri" pitchFamily="2" charset="-78"/>
                 <a:cs typeface="Amiri" pitchFamily="2" charset="-78"/>
               </a:rPr>
               <a:t>أ</a:t>
@@ -8154,6 +8209,7 @@
                   <a:srgbClr val="1B3B6F"/>
                 </a:solidFill>
                 <a:latin typeface="Amiri" pitchFamily="2" charset="-78"/>
+                <a:ea typeface="Amiri" pitchFamily="2" charset="-78"/>
                 <a:cs typeface="Amiri" pitchFamily="2" charset="-78"/>
               </a:rPr>
               <a:t>أ</a:t>
@@ -8205,6 +8261,7 @@
                   <a:srgbClr val="8A6D1E"/>
                 </a:solidFill>
                 <a:latin typeface="Amiri" pitchFamily="2" charset="-78"/>
+                <a:ea typeface="Amiri" pitchFamily="2" charset="-78"/>
                 <a:cs typeface="Amiri" pitchFamily="2" charset="-78"/>
               </a:rPr>
               <a:t>نَمُوذَجُ الإِجَابَةِ</a:t>
@@ -8318,6 +8375,7 @@
                   <a:srgbClr val="1F2A37"/>
                 </a:solidFill>
                 <a:latin typeface="Amiri" pitchFamily="2" charset="-78"/>
+                <a:ea typeface="Amiri" pitchFamily="2" charset="-78"/>
                 <a:cs typeface="Amiri" pitchFamily="2" charset="-78"/>
               </a:rPr>
               <a:t>أَوَّلًا، أَنَا الآنَ فِي الصَّفِّ الحَادِي عَشَرَ، وَأَدْرُسُ تِسْعَ مَوَادَّ. مَادَّتِي المُفَضَّلَةُ العَرَبِيَّةُ، لِأَنَّهَا لُغَةُ عَائِلَتِي. أُحِبُّ الفَرَنْسِيَّةَ أَيْضًا، لٰكِنَّ القَوَاعِدَ صَعْبَةٌ. أُرَاجِعُ كُلَّ يَوْمٍ سَاعَتَيْنِ فِي المَكْتَبَةِ، لِأَنَّ الامْتِحَانَاتِ قَرِيبَةٌ.</a:t>
@@ -8337,6 +8395,7 @@
                   <a:srgbClr val="1F2A37"/>
                 </a:solidFill>
                 <a:latin typeface="Amiri" pitchFamily="2" charset="-78"/>
+                <a:ea typeface="Amiri" pitchFamily="2" charset="-78"/>
                 <a:cs typeface="Amiri" pitchFamily="2" charset="-78"/>
               </a:rPr>
               <a:t>بِالإِضَافَةِ إِلَى ذٰلِكَ، أَتَكَلَّمُ ثَلَاثَ لُغَاتٍ: الإِنْجْلِيزِيَّةَ وَالعَرَبِيَّةَ وَالأُرْدِيَّةَ. فِي البَيْتِ أَتَكَلَّمُ الأُرْدِيَّةَ مَعَ جَدَّتِي، وَفِي المَدْرَسَةِ الإِنْجْلِيزِيَّةَ. فِي الصَّيْفِ المَاضِي زُرْتُ الأُرْدُنَّ فِي تَبَادُلٍ ثَقَافِيٍّ، وَأَعْجَبَنِي كَرَمُ النَّاسِ هُنَاكَ.</a:t>
@@ -8356,6 +8415,7 @@
                   <a:srgbClr val="1F2A37"/>
                 </a:solidFill>
                 <a:latin typeface="Amiri" pitchFamily="2" charset="-78"/>
+                <a:ea typeface="Amiri" pitchFamily="2" charset="-78"/>
                 <a:cs typeface="Amiri" pitchFamily="2" charset="-78"/>
               </a:rPr>
               <a:t>فِي الشَّهْرِ المَاضِي قَضَيْتُ أُسْبُوعًا فِي خِبْرَةِ عَمَلٍ فِي مَرْكَزٍ ثَقَافِيٍّ عَرَبِيٍّ. كُنْتُ أُتَرْجِمُ لِلزُّوَّارِ، وَأُسَاعِدُ فِي الاسْتِقْبَالِ. كَانَ العَمَلُ مُتْعِبًا، وَمَعَ ذٰلِكَ كَانَ مُمْتِعًا جِدًّا.</a:t>
@@ -8375,6 +8435,7 @@
                   <a:srgbClr val="1F2A37"/>
                 </a:solidFill>
                 <a:latin typeface="Amiri" pitchFamily="2" charset="-78"/>
+                <a:ea typeface="Amiri" pitchFamily="2" charset="-78"/>
                 <a:cs typeface="Amiri" pitchFamily="2" charset="-78"/>
               </a:rPr>
               <a:t>لِذٰلِكَ أَطْمَحُ إِلَى أَنْ أَعْمَلَ مُتَرْجِمَةً فِي مُنَظَّمَةٍ دُوَلِيَّةٍ. سَأَدْرُسُ اللُّغَاتِ فِي الجَامِعَةِ. وَإِذَا لَمْ أُقْبَلْ، فَسَأَدْرُسُ العَرَبِيَّةَ فِي مَعْهَدٍ سَنَةً، ثُمَّ أُحَاوِلُ مِنْ جَدِيدٍ بِثِقَةٍ أَكْبَرَ.</a:t>
@@ -8538,11 +8599,12 @@
               <a:buNone/>
             </a:pPr>
             <a:r>
-              <a:rPr lang="en-US" sz="950" b="1" dirty="0">
+              <a:rPr lang="ar-SA" sz="950" b="1" dirty="0">
                 <a:solidFill>
                   <a:srgbClr val="FFFFFF"/>
                 </a:solidFill>
                 <a:latin typeface="Calibri" pitchFamily="34" charset="0"/>
+                <a:ea typeface="Amiri" pitchFamily="2" charset="-78"/>
                 <a:cs typeface="Amiri" pitchFamily="2" charset="-78"/>
               </a:rPr>
               <a:t>أَوَّلًا</a:t>
@@ -8603,11 +8665,12 @@
               <a:buNone/>
             </a:pPr>
             <a:r>
-              <a:rPr lang="en-US" sz="950" b="1" dirty="0">
+              <a:rPr lang="ar-SA" sz="950" b="1" dirty="0">
                 <a:solidFill>
                   <a:srgbClr val="FFFFFF"/>
                 </a:solidFill>
                 <a:latin typeface="Calibri" pitchFamily="34" charset="0"/>
+                <a:ea typeface="Amiri" pitchFamily="2" charset="-78"/>
                 <a:cs typeface="Amiri" pitchFamily="2" charset="-78"/>
               </a:rPr>
               <a:t>بِالإِضَافَةِ إِلَى ذٰلِكَ</a:t>
@@ -8668,11 +8731,12 @@
               <a:buNone/>
             </a:pPr>
             <a:r>
-              <a:rPr lang="en-US" sz="950" b="1" dirty="0">
+              <a:rPr lang="ar-SA" sz="950" b="1" dirty="0">
                 <a:solidFill>
                   <a:srgbClr val="FFFFFF"/>
                 </a:solidFill>
                 <a:latin typeface="Calibri" pitchFamily="34" charset="0"/>
+                <a:ea typeface="Amiri" pitchFamily="2" charset="-78"/>
                 <a:cs typeface="Amiri" pitchFamily="2" charset="-78"/>
               </a:rPr>
               <a:t>كُنْتُ أُتَرْجِمُ</a:t>
@@ -8733,11 +8797,12 @@
               <a:buNone/>
             </a:pPr>
             <a:r>
-              <a:rPr lang="en-US" sz="950" b="1" dirty="0">
+              <a:rPr lang="ar-SA" sz="950" b="1" dirty="0">
                 <a:solidFill>
                   <a:srgbClr val="FFFFFF"/>
                 </a:solidFill>
                 <a:latin typeface="Calibri" pitchFamily="34" charset="0"/>
+                <a:ea typeface="Amiri" pitchFamily="2" charset="-78"/>
                 <a:cs typeface="Amiri" pitchFamily="2" charset="-78"/>
               </a:rPr>
               <a:t>إِذَا لَمْ أُقْبَلْ</a:t>
@@ -8871,6 +8936,7 @@
                   <a:srgbClr val="D4AF37"/>
                 </a:solidFill>
                 <a:latin typeface="Amiri" pitchFamily="2" charset="-78"/>
+                <a:ea typeface="Amiri" pitchFamily="2" charset="-78"/>
                 <a:cs typeface="Amiri" pitchFamily="2" charset="-78"/>
               </a:rPr>
               <a:t>م</a:t>
@@ -9128,6 +9194,7 @@
                   <a:srgbClr val="8A6D1E"/>
                 </a:solidFill>
                 <a:latin typeface="Amiri" pitchFamily="2" charset="-78"/>
+                <a:ea typeface="Amiri" pitchFamily="2" charset="-78"/>
                 <a:cs typeface="Amiri" pitchFamily="2" charset="-78"/>
               </a:rPr>
               <a:t>أ</a:t>
@@ -9192,6 +9259,7 @@
                   <a:srgbClr val="1B3B6F"/>
                 </a:solidFill>
                 <a:latin typeface="Amiri" pitchFamily="2" charset="-78"/>
+                <a:ea typeface="Amiri" pitchFamily="2" charset="-78"/>
                 <a:cs typeface="Amiri" pitchFamily="2" charset="-78"/>
               </a:rPr>
               <a:t>أ</a:t>
@@ -9243,6 +9311,7 @@
                   <a:srgbClr val="8A6D1E"/>
                 </a:solidFill>
                 <a:latin typeface="Amiri" pitchFamily="2" charset="-78"/>
+                <a:ea typeface="Amiri" pitchFamily="2" charset="-78"/>
                 <a:cs typeface="Amiri" pitchFamily="2" charset="-78"/>
               </a:rPr>
               <a:t>نَمُوذَجُ الإِجَابَةِ</a:t>
@@ -9356,6 +9425,7 @@
                   <a:srgbClr val="1F2A37"/>
                 </a:solidFill>
                 <a:latin typeface="Amiri" pitchFamily="2" charset="-78"/>
+                <a:ea typeface="Amiri" pitchFamily="2" charset="-78"/>
                 <a:cs typeface="Amiri" pitchFamily="2" charset="-78"/>
               </a:rPr>
               <a:t>حِينَ سَأَلَتْنِي المُرْشِدَةُ المِهْنِيَّةُ عَنْ أَهَمِّ مَهَارَاتِي، لَمْ أَذْكُرِ الرِّيَاضِيَّاتِ أَوِ العُلُومَ، بَلْ قُلْتُ: "أَعِيشُ بِثَلَاثِ لُغَاتٍ". فَأَنَا أُفَكِّرُ بِالإِنْجْلِيزِيَّةِ، وَأُصَلِّي بِالعَرَبِيَّةِ، وَأُكَلِّمُ جَدَّتِي بِالأُرْدِيَّةِ الَّتِي حَمَلَتْهَا مَعَهَا مِنْ لَاهُورَ.</a:t>
@@ -9375,6 +9445,7 @@
                   <a:srgbClr val="1F2A37"/>
                 </a:solidFill>
                 <a:latin typeface="Amiri" pitchFamily="2" charset="-78"/>
+                <a:ea typeface="Amiri" pitchFamily="2" charset="-78"/>
                 <a:cs typeface="Amiri" pitchFamily="2" charset="-78"/>
               </a:rPr>
               <a:t>وَقَدِ اخْتَرْتُ مَوَادِّي لِلْمَرْحَلَةِ القَادِمَةِ عَلَى هٰذَا الأَسَاسِ: العَرَبِيَّةَ وَالفَرَنْسِيَّةَ وَالتَّارِيخَ. وَمَعَ أَنَّ الفَرَنْسِيَّةَ أَصْعَبُ مَوَادِّي، فَإِنَّ تَنْظِيمَ المُرَاجَعَةِ وَحَلَّ الامْتِحَانَاتِ السَّابِقَةِ جَعَلَانِي أَتَقَدَّمُ فِيهَا بِسُرْعَةٍ.</a:t>
@@ -9394,6 +9465,7 @@
                   <a:srgbClr val="1F2A37"/>
                 </a:solidFill>
                 <a:latin typeface="Amiri" pitchFamily="2" charset="-78"/>
+                <a:ea typeface="Amiri" pitchFamily="2" charset="-78"/>
                 <a:cs typeface="Amiri" pitchFamily="2" charset="-78"/>
               </a:rPr>
               <a:t>غَيْرَ أَنَّ أَهَمَّ مَا عَلَّمَنِي كَانَ خَارِجَ الصَّفِّ؛ فَفِي تَبَادُلٍ ثَقَافِيٍّ فِي عَمَّانَ اكْتَشَفْتُ أَنَّ اللُّغَةَ لَيْسَتْ كَلِمَاتٍ فَحَسْبُ، بَلْ عَادَاتٌ وَإِيمَاءَاتٌ وَطَرِيقَةُ تَفْكِيرٍ. ثُمَّ أَكَّدَتْ لِي خِبْرَةُ العَمَلِ فِي مَرْكَزٍ ثَقَافِيٍّ أَنَّ المُتَرْجِمَ جِسْرٌ بَيْنَ الثَّقَافَاتِ لَا مُجَرَّدُ قَامُوسٍ.</a:t>
@@ -9413,6 +9485,7 @@
                   <a:srgbClr val="1F2A37"/>
                 </a:solidFill>
                 <a:latin typeface="Amiri" pitchFamily="2" charset="-78"/>
+                <a:ea typeface="Amiri" pitchFamily="2" charset="-78"/>
                 <a:cs typeface="Amiri" pitchFamily="2" charset="-78"/>
               </a:rPr>
               <a:t>لِذٰلِكَ أَطْمَحُ إِلَى دِرَاسَةِ التَّرْجَمَةِ، ثُمَّ العَمَلِ فِي مُنَظَّمَةٍ دُوَلِيَّةٍ. صَحِيحٌ أَنَّ المُنَافَسَةَ شَدِيدَةٌ، غَيْرَ أَنَّ لِي خُطَّةً بَدِيلَةً: أَنْ أَدْرُسَ اللُّغَاتِ فِي مَعْهَدٍ ثُمَّ أُحَاوِلَ مِنْ جَدِيدٍ. وَلَوْ سَأَلَتْنِي المُرْشِدَةُ اليَوْمَ، لَقُلْتُ: "أُرِيدُ أَنْ أُسَاعِدَ النَّاسَ عَلَى أَنْ يَفْهَمُوا بَعْضَهُمْ".</a:t>
@@ -9511,11 +9584,12 @@
               <a:buNone/>
             </a:pPr>
             <a:r>
-              <a:rPr lang="en-US" sz="950" b="1" dirty="0">
+              <a:rPr lang="ar-SA" sz="950" b="1" dirty="0">
                 <a:solidFill>
                   <a:srgbClr val="FFFFFF"/>
                 </a:solidFill>
                 <a:latin typeface="Calibri" pitchFamily="34" charset="0"/>
+                <a:ea typeface="Amiri" pitchFamily="2" charset="-78"/>
                 <a:cs typeface="Amiri" pitchFamily="2" charset="-78"/>
               </a:rPr>
               <a:t>لَمْ أَذْكُرْ … بَلْ قُلْتُ</a:t>
@@ -9576,11 +9650,12 @@
               <a:buNone/>
             </a:pPr>
             <a:r>
-              <a:rPr lang="en-US" sz="950" b="1" dirty="0">
+              <a:rPr lang="ar-SA" sz="950" b="1" dirty="0">
                 <a:solidFill>
                   <a:srgbClr val="FFFFFF"/>
                 </a:solidFill>
                 <a:latin typeface="Calibri" pitchFamily="34" charset="0"/>
+                <a:ea typeface="Amiri" pitchFamily="2" charset="-78"/>
                 <a:cs typeface="Amiri" pitchFamily="2" charset="-78"/>
               </a:rPr>
               <a:t>مَعَ أَنَّ … فَإِنَّ</a:t>
@@ -9641,11 +9716,12 @@
               <a:buNone/>
             </a:pPr>
             <a:r>
-              <a:rPr lang="en-US" sz="950" b="1" dirty="0">
+              <a:rPr lang="ar-SA" sz="950" b="1" dirty="0">
                 <a:solidFill>
                   <a:srgbClr val="FFFFFF"/>
                 </a:solidFill>
                 <a:latin typeface="Calibri" pitchFamily="34" charset="0"/>
+                <a:ea typeface="Amiri" pitchFamily="2" charset="-78"/>
                 <a:cs typeface="Amiri" pitchFamily="2" charset="-78"/>
               </a:rPr>
               <a:t>لَيْسَتْ كَلِمَاتٍ فَحَسْبُ، بَلْ</a:t>
@@ -9706,11 +9782,12 @@
               <a:buNone/>
             </a:pPr>
             <a:r>
-              <a:rPr lang="en-US" sz="950" b="1" dirty="0">
+              <a:rPr lang="ar-SA" sz="950" b="1" dirty="0">
                 <a:solidFill>
                   <a:srgbClr val="FFFFFF"/>
                 </a:solidFill>
                 <a:latin typeface="Calibri" pitchFamily="34" charset="0"/>
+                <a:ea typeface="Amiri" pitchFamily="2" charset="-78"/>
                 <a:cs typeface="Amiri" pitchFamily="2" charset="-78"/>
               </a:rPr>
               <a:t>لَوْ سَأَلَتْنِي … لَقُلْتُ</a:t>
@@ -9844,6 +9921,7 @@
                   <a:srgbClr val="D4AF37"/>
                 </a:solidFill>
                 <a:latin typeface="Amiri" pitchFamily="2" charset="-78"/>
+                <a:ea typeface="Amiri" pitchFamily="2" charset="-78"/>
                 <a:cs typeface="Amiri" pitchFamily="2" charset="-78"/>
               </a:rPr>
               <a:t>م</a:t>
@@ -10101,6 +10179,7 @@
                   <a:srgbClr val="8A6D1E"/>
                 </a:solidFill>
                 <a:latin typeface="Amiri" pitchFamily="2" charset="-78"/>
+                <a:ea typeface="Amiri" pitchFamily="2" charset="-78"/>
                 <a:cs typeface="Amiri" pitchFamily="2" charset="-78"/>
               </a:rPr>
               <a:t>ب</a:t>
@@ -10165,6 +10244,7 @@
                   <a:srgbClr val="1B3B6F"/>
                 </a:solidFill>
                 <a:latin typeface="Amiri" pitchFamily="2" charset="-78"/>
+                <a:ea typeface="Amiri" pitchFamily="2" charset="-78"/>
                 <a:cs typeface="Amiri" pitchFamily="2" charset="-78"/>
               </a:rPr>
               <a:t>ب</a:t>
@@ -10216,6 +10296,7 @@
                   <a:srgbClr val="8A6D1E"/>
                 </a:solidFill>
                 <a:latin typeface="Amiri" pitchFamily="2" charset="-78"/>
+                <a:ea typeface="Amiri" pitchFamily="2" charset="-78"/>
                 <a:cs typeface="Amiri" pitchFamily="2" charset="-78"/>
               </a:rPr>
               <a:t>نَمُوذَجُ الإِجَابَةِ</a:t>
@@ -10329,6 +10410,7 @@
                   <a:srgbClr val="1F2A37"/>
                 </a:solidFill>
                 <a:latin typeface="Amiri" pitchFamily="2" charset="-78"/>
+                <a:ea typeface="Amiri" pitchFamily="2" charset="-78"/>
                 <a:cs typeface="Amiri" pitchFamily="2" charset="-78"/>
               </a:rPr>
               <a:t>فِي إِعْلَانَاتِ الوَظَائِفِ اليَوْمَ، نَادِرًا مَا نَجِدُ وَظِيفَةً دُوَلِيَّةً لَا تَطْلُبُ لُغَةً ثَانِيَةً عَلَى الأَقَلِّ، خُصُوصًا فِي المُدُنِ الكَبِيرَةِ كَلَنْدَنَ وَدُبَيّ. فَهَلْ يَجِبُ أَنْ يَتَعَلَّمَ كُلُّ طَالِبٍ لُغَتَيْنِ لِيَنْجَحَ فِي عَالَمِ العَمَلِ؟</a:t>
@@ -10348,6 +10430,7 @@
                   <a:srgbClr val="1F2A37"/>
                 </a:solidFill>
                 <a:latin typeface="Amiri" pitchFamily="2" charset="-78"/>
+                <a:ea typeface="Amiri" pitchFamily="2" charset="-78"/>
                 <a:cs typeface="Amiri" pitchFamily="2" charset="-78"/>
               </a:rPr>
               <a:t>مِنْ نَاحِيَةٍ، تَفْتَحُ اللُّغَاتُ لِلشَّبَابِ أَبْوَابًا كَثِيرَةً، كَالتَّرْجَمَةِ وَالسِّيَاحَةِ وَالتِّجَارَةِ الدُّوَلِيَّةِ، كَمَا أَنَّهَا تُعَلِّمُ الطَّالِبَ احْتِرَامَ الثَّقَافَاتِ الأُخْرَى. وَمِنْ نَاحِيَةٍ أُخْرَى، يَرَى بَعْضُ النَّاسِ أَنَّ التَّرْجَمَةَ الآلِيَّةَ صَارَتْ كَافِيَةً وَسَرِيعَةً، وَأَنَّ المَهَارَاتِ التِّقْنِيَّةَ أَهَمُّ، كَالبَرْمَجَةِ وَتَحْلِيلِ البَيَانَاتِ.</a:t>
@@ -10367,6 +10450,7 @@
                   <a:srgbClr val="1F2A37"/>
                 </a:solidFill>
                 <a:latin typeface="Amiri" pitchFamily="2" charset="-78"/>
+                <a:ea typeface="Amiri" pitchFamily="2" charset="-78"/>
                 <a:cs typeface="Amiri" pitchFamily="2" charset="-78"/>
               </a:rPr>
               <a:t>وَقَدْ رَأَيْتُ أَثَرَ اللُّغَةِ بِنَفْسِي الشَّهْرَ المَاضِيَ؛ فَفِي خِبْرَةِ العَمَلِ اخْتَارَنِي المُدِيرُ لِاسْتِقْبَالِ وَفْدٍ مِنَ الأُرْدُنِّ لِأَنِّي أَتَكَلَّمُ العَرَبِيَّةَ، بَيْنَمَا كَانَ زُمَلَائِي يَعْتَمِدُونَ عَلَى التَّطْبِيقَاتِ، فَشَعَرَ الضُّيُوفُ بِالرَّاحَةِ مَعِي أَكْثَرَ، وَشَكَرُونِي بِالعَرَبِيَّةِ فِي نِهَايَةِ الزِّيَارَةِ.</a:t>
@@ -10386,6 +10470,7 @@
                   <a:srgbClr val="1F2A37"/>
                 </a:solidFill>
                 <a:latin typeface="Amiri" pitchFamily="2" charset="-78"/>
+                <a:ea typeface="Amiri" pitchFamily="2" charset="-78"/>
                 <a:cs typeface="Amiri" pitchFamily="2" charset="-78"/>
               </a:rPr>
               <a:t>صَحِيحٌ أَنَّ التِّكْنُولُوجْيَا تُسَاعِدُ، غَيْرَ أَنَّهَا لَا تَبْنِي الثِّقَةَ كَمَا يَبْنِيهَا الكَلَامُ المُبَاشِرُ بِلُغَةِ الآخَرِ. فَإِذَا تَعَلَّمَ الطُّلَّابُ لُغَتَيْنِ، فَسَيَدْخُلُونَ عَالَمَ العَمَلِ بِمِفْتَاحَيْنِ بَدَلًا مِنْ مِفْتَاحٍ وَاحِدٍ، وَبِقُلُوبٍ أَكْثَرَ انْفِتَاحًا.</a:t>
@@ -10484,11 +10569,12 @@
               <a:buNone/>
             </a:pPr>
             <a:r>
-              <a:rPr lang="en-US" sz="950" b="1" dirty="0">
+              <a:rPr lang="ar-SA" sz="950" b="1" dirty="0">
                 <a:solidFill>
                   <a:srgbClr val="FFFFFF"/>
                 </a:solidFill>
                 <a:latin typeface="Calibri" pitchFamily="34" charset="0"/>
+                <a:ea typeface="Amiri" pitchFamily="2" charset="-78"/>
                 <a:cs typeface="Amiri" pitchFamily="2" charset="-78"/>
               </a:rPr>
               <a:t>نَادِرًا مَا نَجِدُ</a:t>
@@ -10549,11 +10635,12 @@
               <a:buNone/>
             </a:pPr>
             <a:r>
-              <a:rPr lang="en-US" sz="950" b="1" dirty="0">
+              <a:rPr lang="ar-SA" sz="950" b="1" dirty="0">
                 <a:solidFill>
                   <a:srgbClr val="FFFFFF"/>
                 </a:solidFill>
                 <a:latin typeface="Calibri" pitchFamily="34" charset="0"/>
+                <a:ea typeface="Amiri" pitchFamily="2" charset="-78"/>
                 <a:cs typeface="Amiri" pitchFamily="2" charset="-78"/>
               </a:rPr>
               <a:t>كَمَا أَنَّهَا تُعَلِّمُ</a:t>
@@ -10614,11 +10701,12 @@
               <a:buNone/>
             </a:pPr>
             <a:r>
-              <a:rPr lang="en-US" sz="950" b="1" dirty="0">
+              <a:rPr lang="ar-SA" sz="950" b="1" dirty="0">
                 <a:solidFill>
                   <a:srgbClr val="FFFFFF"/>
                 </a:solidFill>
                 <a:latin typeface="Calibri" pitchFamily="34" charset="0"/>
+                <a:ea typeface="Amiri" pitchFamily="2" charset="-78"/>
                 <a:cs typeface="Amiri" pitchFamily="2" charset="-78"/>
               </a:rPr>
               <a:t>بَيْنَمَا كَانَ زُمَلَائِي</a:t>
@@ -10679,11 +10767,12 @@
               <a:buNone/>
             </a:pPr>
             <a:r>
-              <a:rPr lang="en-US" sz="950" b="1" dirty="0">
+              <a:rPr lang="ar-SA" sz="950" b="1" dirty="0">
                 <a:solidFill>
                   <a:srgbClr val="FFFFFF"/>
                 </a:solidFill>
                 <a:latin typeface="Calibri" pitchFamily="34" charset="0"/>
+                <a:ea typeface="Amiri" pitchFamily="2" charset="-78"/>
                 <a:cs typeface="Amiri" pitchFamily="2" charset="-78"/>
               </a:rPr>
               <a:t>بِمِفْتَاحَيْنِ بَدَلًا مِنْ</a:t>
@@ -10817,6 +10906,7 @@
                   <a:srgbClr val="D4AF37"/>
                 </a:solidFill>
                 <a:latin typeface="Amiri" pitchFamily="2" charset="-78"/>
+                <a:ea typeface="Amiri" pitchFamily="2" charset="-78"/>
                 <a:cs typeface="Amiri" pitchFamily="2" charset="-78"/>
               </a:rPr>
               <a:t>م</a:t>
@@ -11137,6 +11227,7 @@
                   <a:srgbClr val="8A6D1E"/>
                 </a:solidFill>
                 <a:latin typeface="Amiri" pitchFamily="2" charset="-78"/>
+                <a:ea typeface="Amiri" pitchFamily="2" charset="-78"/>
                 <a:cs typeface="Amiri" pitchFamily="2" charset="-78"/>
               </a:rPr>
               <a:t>قَيِّمْ عَمَلَكَ</a:t>
@@ -12381,6 +12472,7 @@
                   <a:srgbClr val="FFFFFF"/>
                 </a:solidFill>
                 <a:latin typeface="Amiri" pitchFamily="2" charset="-78"/>
+                <a:ea typeface="Amiri" pitchFamily="2" charset="-78"/>
                 <a:cs typeface="Amiri" pitchFamily="2" charset="-78"/>
               </a:rPr>
               <a:t>أَحْسَنْتُمْ! إِلَى اللِّقَاءِ</a:t>
@@ -12533,6 +12625,7 @@
                   <a:srgbClr val="D4AF37"/>
                 </a:solidFill>
                 <a:latin typeface="Amiri" pitchFamily="2" charset="-78"/>
+                <a:ea typeface="Amiri" pitchFamily="2" charset="-78"/>
                 <a:cs typeface="Amiri" pitchFamily="2" charset="-78"/>
               </a:rPr>
               <a:t>وَرْشَةُ التَّدْرِيبِ</a:t>
@@ -12666,6 +12759,7 @@
                   <a:srgbClr val="D4AF37"/>
                 </a:solidFill>
                 <a:latin typeface="Amiri" pitchFamily="2" charset="-78"/>
+                <a:ea typeface="Amiri" pitchFamily="2" charset="-78"/>
                 <a:cs typeface="Amiri" pitchFamily="2" charset="-78"/>
               </a:rPr>
               <a:t>م</a:t>
@@ -12986,6 +13080,7 @@
                   <a:srgbClr val="8A6D1E"/>
                 </a:solidFill>
                 <a:latin typeface="Amiri" pitchFamily="2" charset="-78"/>
+                <a:ea typeface="Amiri" pitchFamily="2" charset="-78"/>
                 <a:cs typeface="Amiri" pitchFamily="2" charset="-78"/>
               </a:rPr>
               <a:t>آدَابُ الصَّفِّ</a:t>
@@ -14517,6 +14612,7 @@
                   <a:srgbClr val="D4AF37"/>
                 </a:solidFill>
                 <a:latin typeface="Amiri" pitchFamily="2" charset="-78"/>
+                <a:ea typeface="Amiri" pitchFamily="2" charset="-78"/>
                 <a:cs typeface="Amiri" pitchFamily="2" charset="-78"/>
               </a:rPr>
               <a:t>م</a:t>
@@ -14837,6 +14933,7 @@
                   <a:srgbClr val="8A6D1E"/>
                 </a:solidFill>
                 <a:latin typeface="Amiri" pitchFamily="2" charset="-78"/>
+                <a:ea typeface="Amiri" pitchFamily="2" charset="-78"/>
                 <a:cs typeface="Amiri" pitchFamily="2" charset="-78"/>
               </a:rPr>
               <a:t>خَرِيطَةُ الوَرْشَةِ</a:t>
@@ -15151,6 +15248,7 @@
                   <a:srgbClr val="1B3B6F"/>
                 </a:solidFill>
                 <a:latin typeface="Amiri" pitchFamily="2" charset="-78"/>
+                <a:ea typeface="Amiri" pitchFamily="2" charset="-78"/>
                 <a:cs typeface="Amiri" pitchFamily="2" charset="-78"/>
               </a:rPr>
               <a:t>كَيْفَ</a:t>
@@ -15427,6 +15525,7 @@
                   <a:srgbClr val="1E6B52"/>
                 </a:solidFill>
                 <a:latin typeface="Amiri" pitchFamily="2" charset="-78"/>
+                <a:ea typeface="Amiri" pitchFamily="2" charset="-78"/>
                 <a:cs typeface="Amiri" pitchFamily="2" charset="-78"/>
               </a:rPr>
               <a:t>الاسْتِمَارَةُ</a:t>
@@ -15703,6 +15802,7 @@
                   <a:srgbClr val="1E6B52"/>
                 </a:solidFill>
                 <a:latin typeface="Amiri" pitchFamily="2" charset="-78"/>
+                <a:ea typeface="Amiri" pitchFamily="2" charset="-78"/>
                 <a:cs typeface="Amiri" pitchFamily="2" charset="-78"/>
               </a:rPr>
               <a:t>الرِّسَالَةُ</a:t>
@@ -15979,6 +16079,7 @@
                   <a:srgbClr val="1E6B52"/>
                 </a:solidFill>
                 <a:latin typeface="Amiri" pitchFamily="2" charset="-78"/>
+                <a:ea typeface="Amiri" pitchFamily="2" charset="-78"/>
                 <a:cs typeface="Amiri" pitchFamily="2" charset="-78"/>
               </a:rPr>
               <a:t>المَقَالُ</a:t>
@@ -16255,6 +16356,7 @@
                   <a:srgbClr val="8A6D1E"/>
                 </a:solidFill>
                 <a:latin typeface="Amiri" pitchFamily="2" charset="-78"/>
+                <a:ea typeface="Amiri" pitchFamily="2" charset="-78"/>
                 <a:cs typeface="Amiri" pitchFamily="2" charset="-78"/>
               </a:rPr>
               <a:t>قَيِّمْ</a:t>
@@ -16498,6 +16600,7 @@
                   <a:srgbClr val="D4AF37"/>
                 </a:solidFill>
                 <a:latin typeface="Amiri" pitchFamily="2" charset="-78"/>
+                <a:ea typeface="Amiri" pitchFamily="2" charset="-78"/>
                 <a:cs typeface="Amiri" pitchFamily="2" charset="-78"/>
               </a:rPr>
               <a:t>م</a:t>
@@ -16818,6 +16921,7 @@
                   <a:srgbClr val="8A6D1E"/>
                 </a:solidFill>
                 <a:latin typeface="Amiri" pitchFamily="2" charset="-78"/>
+                <a:ea typeface="Amiri" pitchFamily="2" charset="-78"/>
                 <a:cs typeface="Amiri" pitchFamily="2" charset="-78"/>
               </a:rPr>
               <a:t>امْتِحَانُ الكِتَابَةِ</a:t>
@@ -17442,6 +17546,7 @@
                   <a:srgbClr val="1B3B6F"/>
                 </a:solidFill>
                 <a:latin typeface="Amiri" pitchFamily="2" charset="-78"/>
+                <a:ea typeface="Amiri" pitchFamily="2" charset="-78"/>
                 <a:cs typeface="Amiri" pitchFamily="2" charset="-78"/>
               </a:rPr>
               <a:t>أُتَرْجِمُ لِلزُّوَّارِ مِنَ العَرَبِيَّةِ إِلَى الإِنْجْلِيزِيَّةِ</a:t>
@@ -17541,6 +17646,7 @@
                   <a:srgbClr val="1B3B6F"/>
                 </a:solidFill>
                 <a:latin typeface="Amiri" pitchFamily="2" charset="-78"/>
+                <a:ea typeface="Amiri" pitchFamily="2" charset="-78"/>
                 <a:cs typeface="Amiri" pitchFamily="2" charset="-78"/>
               </a:rPr>
               <a:t>العَمَلُ مُتْعِبٌ، وَمَعَ ذٰلِكَ أُحِبُّهُ كَثِيرًا</a:t>
@@ -17640,6 +17746,7 @@
                   <a:srgbClr val="1B3B6F"/>
                 </a:solidFill>
                 <a:latin typeface="Amiri" pitchFamily="2" charset="-78"/>
+                <a:ea typeface="Amiri" pitchFamily="2" charset="-78"/>
                 <a:cs typeface="Amiri" pitchFamily="2" charset="-78"/>
               </a:rPr>
               <a:t>إِذَا لَمْ أُقْبَلْ، فَسَأَدْرُسُ …</a:t>
@@ -17811,6 +17918,7 @@
                   <a:srgbClr val="D4AF37"/>
                 </a:solidFill>
                 <a:latin typeface="Amiri" pitchFamily="2" charset="-78"/>
+                <a:ea typeface="Amiri" pitchFamily="2" charset="-78"/>
                 <a:cs typeface="Amiri" pitchFamily="2" charset="-78"/>
               </a:rPr>
               <a:t>م</a:t>
@@ -18131,6 +18239,7 @@
                   <a:srgbClr val="8A6D1E"/>
                 </a:solidFill>
                 <a:latin typeface="Amiri" pitchFamily="2" charset="-78"/>
+                <a:ea typeface="Amiri" pitchFamily="2" charset="-78"/>
                 <a:cs typeface="Amiri" pitchFamily="2" charset="-78"/>
               </a:rPr>
               <a:t>اسْتِمَارَةُ طَلَبِ وَظِيفَةٍ صَيْفِيَّةٍ</a:t>
@@ -18487,6 +18596,7 @@
                   <a:srgbClr val="1B3B6F"/>
                 </a:solidFill>
                 <a:latin typeface="Amiri" pitchFamily="2" charset="-78"/>
+                <a:ea typeface="Amiri" pitchFamily="2" charset="-78"/>
                 <a:cs typeface="Amiri" pitchFamily="2" charset="-78"/>
               </a:rPr>
               <a:t>الاسْمُ</a:t>
@@ -18731,6 +18841,7 @@
                   <a:srgbClr val="1B3B6F"/>
                 </a:solidFill>
                 <a:latin typeface="Amiri" pitchFamily="2" charset="-78"/>
+                <a:ea typeface="Amiri" pitchFamily="2" charset="-78"/>
                 <a:cs typeface="Amiri" pitchFamily="2" charset="-78"/>
               </a:rPr>
               <a:t>المَدْرَسَةُ وَالصَّفُّ</a:t>
@@ -18975,6 +19086,7 @@
                   <a:srgbClr val="1B3B6F"/>
                 </a:solidFill>
                 <a:latin typeface="Amiri" pitchFamily="2" charset="-78"/>
+                <a:ea typeface="Amiri" pitchFamily="2" charset="-78"/>
                 <a:cs typeface="Amiri" pitchFamily="2" charset="-78"/>
               </a:rPr>
               <a:t>الوَظِيفَةُ المَطْلُوبَةُ</a:t>
@@ -19219,6 +19331,7 @@
                   <a:srgbClr val="1B3B6F"/>
                 </a:solidFill>
                 <a:latin typeface="Amiri" pitchFamily="2" charset="-78"/>
+                <a:ea typeface="Amiri" pitchFamily="2" charset="-78"/>
                 <a:cs typeface="Amiri" pitchFamily="2" charset="-78"/>
               </a:rPr>
               <a:t>اللُّغَاتُ</a:t>
@@ -19463,6 +19576,7 @@
                   <a:srgbClr val="1B3B6F"/>
                 </a:solidFill>
                 <a:latin typeface="Amiri" pitchFamily="2" charset="-78"/>
+                <a:ea typeface="Amiri" pitchFamily="2" charset="-78"/>
                 <a:cs typeface="Amiri" pitchFamily="2" charset="-78"/>
               </a:rPr>
               <a:t>صِفَتَانِ</a:t>
@@ -19707,6 +19821,7 @@
                   <a:srgbClr val="1B3B6F"/>
                 </a:solidFill>
                 <a:latin typeface="Amiri" pitchFamily="2" charset="-78"/>
+                <a:ea typeface="Amiri" pitchFamily="2" charset="-78"/>
                 <a:cs typeface="Amiri" pitchFamily="2" charset="-78"/>
               </a:rPr>
               <a:t>الأَيَّامُ المُتَاحَةُ</a:t>
@@ -19951,6 +20066,7 @@
                   <a:srgbClr val="1B3B6F"/>
                 </a:solidFill>
                 <a:latin typeface="Amiri" pitchFamily="2" charset="-78"/>
+                <a:ea typeface="Amiri" pitchFamily="2" charset="-78"/>
                 <a:cs typeface="Amiri" pitchFamily="2" charset="-78"/>
               </a:rPr>
               <a:t>خِبْرَةٌ سَابِقَةٌ</a:t>
@@ -20130,6 +20246,7 @@
                   <a:srgbClr val="1B3B6F"/>
                 </a:solidFill>
                 <a:latin typeface="Amiri" pitchFamily="2" charset="-78"/>
+                <a:ea typeface="Amiri" pitchFamily="2" charset="-78"/>
                 <a:cs typeface="Amiri" pitchFamily="2" charset="-78"/>
               </a:rPr>
               <a:t>جُمْلَةٌ: لِمَاذَا تُنَاسِبُكِ الوَظِيفَةُ؟</a:t>
@@ -20339,6 +20456,7 @@
                   <a:srgbClr val="D4AF37"/>
                 </a:solidFill>
                 <a:latin typeface="Amiri" pitchFamily="2" charset="-78"/>
+                <a:ea typeface="Amiri" pitchFamily="2" charset="-78"/>
                 <a:cs typeface="Amiri" pitchFamily="2" charset="-78"/>
               </a:rPr>
               <a:t>م</a:t>
@@ -20659,6 +20777,7 @@
                   <a:srgbClr val="8A6D1E"/>
                 </a:solidFill>
                 <a:latin typeface="Amiri" pitchFamily="2" charset="-78"/>
+                <a:ea typeface="Amiri" pitchFamily="2" charset="-78"/>
                 <a:cs typeface="Amiri" pitchFamily="2" charset="-78"/>
               </a:rPr>
               <a:t>نَمُوذَجُ الإِجَابَةِ</a:t>
@@ -20977,6 +21096,7 @@
                   <a:srgbClr val="1B3B6F"/>
                 </a:solidFill>
                 <a:latin typeface="Amiri" pitchFamily="2" charset="-78"/>
+                <a:ea typeface="Amiri" pitchFamily="2" charset="-78"/>
                 <a:cs typeface="Amiri" pitchFamily="2" charset="-78"/>
               </a:rPr>
               <a:t>رُقَيَّةُ خَانُ</a:t>
@@ -21015,6 +21135,7 @@
                   <a:srgbClr val="1B3B6F"/>
                 </a:solidFill>
                 <a:latin typeface="Amiri" pitchFamily="2" charset="-78"/>
+                <a:ea typeface="Amiri" pitchFamily="2" charset="-78"/>
                 <a:cs typeface="Amiri" pitchFamily="2" charset="-78"/>
               </a:rPr>
               <a:t>الاسْمُ</a:t>
@@ -21156,6 +21277,7 @@
                   <a:srgbClr val="1B3B6F"/>
                 </a:solidFill>
                 <a:latin typeface="Amiri" pitchFamily="2" charset="-78"/>
+                <a:ea typeface="Amiri" pitchFamily="2" charset="-78"/>
                 <a:cs typeface="Amiri" pitchFamily="2" charset="-78"/>
               </a:rPr>
               <a:t>مَدْرَسَةُ المَدِينَةِ، الحَادِي عَشَرَ</a:t>
@@ -21194,6 +21316,7 @@
                   <a:srgbClr val="1B3B6F"/>
                 </a:solidFill>
                 <a:latin typeface="Amiri" pitchFamily="2" charset="-78"/>
+                <a:ea typeface="Amiri" pitchFamily="2" charset="-78"/>
                 <a:cs typeface="Amiri" pitchFamily="2" charset="-78"/>
               </a:rPr>
               <a:t>المَدْرَسَةُ وَالصَّفُّ</a:t>
@@ -21335,6 +21458,7 @@
                   <a:srgbClr val="1B3B6F"/>
                 </a:solidFill>
                 <a:latin typeface="Amiri" pitchFamily="2" charset="-78"/>
+                <a:ea typeface="Amiri" pitchFamily="2" charset="-78"/>
                 <a:cs typeface="Amiri" pitchFamily="2" charset="-78"/>
               </a:rPr>
               <a:t>مُوَظَّفَةُ اسْتِقْبَالٍ</a:t>
@@ -21373,6 +21497,7 @@
                   <a:srgbClr val="1B3B6F"/>
                 </a:solidFill>
                 <a:latin typeface="Amiri" pitchFamily="2" charset="-78"/>
+                <a:ea typeface="Amiri" pitchFamily="2" charset="-78"/>
                 <a:cs typeface="Amiri" pitchFamily="2" charset="-78"/>
               </a:rPr>
               <a:t>الوَظِيفَةُ المَطْلُوبَةُ</a:t>
@@ -21514,6 +21639,7 @@
                   <a:srgbClr val="1B3B6F"/>
                 </a:solidFill>
                 <a:latin typeface="Amiri" pitchFamily="2" charset="-78"/>
+                <a:ea typeface="Amiri" pitchFamily="2" charset="-78"/>
                 <a:cs typeface="Amiri" pitchFamily="2" charset="-78"/>
               </a:rPr>
               <a:t>الإِنْجْلِيزِيَّةُ وَالعَرَبِيَّةُ وَالأُرْدِيَّةُ</a:t>
@@ -21552,6 +21678,7 @@
                   <a:srgbClr val="1B3B6F"/>
                 </a:solidFill>
                 <a:latin typeface="Amiri" pitchFamily="2" charset="-78"/>
+                <a:ea typeface="Amiri" pitchFamily="2" charset="-78"/>
                 <a:cs typeface="Amiri" pitchFamily="2" charset="-78"/>
               </a:rPr>
               <a:t>اللُّغَاتُ</a:t>
@@ -21693,6 +21820,7 @@
                   <a:srgbClr val="1B3B6F"/>
                 </a:solidFill>
                 <a:latin typeface="Amiri" pitchFamily="2" charset="-78"/>
+                <a:ea typeface="Amiri" pitchFamily="2" charset="-78"/>
                 <a:cs typeface="Amiri" pitchFamily="2" charset="-78"/>
               </a:rPr>
               <a:t>مُنَظَّمَةٌ وَصَبُورَةٌ</a:t>
@@ -21731,6 +21859,7 @@
                   <a:srgbClr val="1B3B6F"/>
                 </a:solidFill>
                 <a:latin typeface="Amiri" pitchFamily="2" charset="-78"/>
+                <a:ea typeface="Amiri" pitchFamily="2" charset="-78"/>
                 <a:cs typeface="Amiri" pitchFamily="2" charset="-78"/>
               </a:rPr>
               <a:t>صِفَتَانِ</a:t>
@@ -21872,6 +22001,7 @@
                   <a:srgbClr val="1B3B6F"/>
                 </a:solidFill>
                 <a:latin typeface="Amiri" pitchFamily="2" charset="-78"/>
+                <a:ea typeface="Amiri" pitchFamily="2" charset="-78"/>
                 <a:cs typeface="Amiri" pitchFamily="2" charset="-78"/>
               </a:rPr>
               <a:t>مِنَ الأَحَدِ إِلَى الخَمِيسِ</a:t>
@@ -21910,6 +22040,7 @@
                   <a:srgbClr val="1B3B6F"/>
                 </a:solidFill>
                 <a:latin typeface="Amiri" pitchFamily="2" charset="-78"/>
+                <a:ea typeface="Amiri" pitchFamily="2" charset="-78"/>
                 <a:cs typeface="Amiri" pitchFamily="2" charset="-78"/>
               </a:rPr>
               <a:t>الأَيَّامُ المُتَاحَةُ</a:t>
@@ -22051,6 +22182,7 @@
                   <a:srgbClr val="1B3B6F"/>
                 </a:solidFill>
                 <a:latin typeface="Amiri" pitchFamily="2" charset="-78"/>
+                <a:ea typeface="Amiri" pitchFamily="2" charset="-78"/>
                 <a:cs typeface="Amiri" pitchFamily="2" charset="-78"/>
               </a:rPr>
               <a:t>أُسْبُوعٌ فِي مَرْكَزٍ ثَقَافِيٍّ</a:t>
@@ -22089,6 +22221,7 @@
                   <a:srgbClr val="1B3B6F"/>
                 </a:solidFill>
                 <a:latin typeface="Amiri" pitchFamily="2" charset="-78"/>
+                <a:ea typeface="Amiri" pitchFamily="2" charset="-78"/>
                 <a:cs typeface="Amiri" pitchFamily="2" charset="-78"/>
               </a:rPr>
               <a:t>خِبْرَةٌ سَابِقَةٌ</a:t>
@@ -22230,6 +22363,7 @@
                   <a:srgbClr val="1B3B6F"/>
                 </a:solidFill>
                 <a:latin typeface="Amiri" pitchFamily="2" charset="-78"/>
+                <a:ea typeface="Amiri" pitchFamily="2" charset="-78"/>
                 <a:cs typeface="Amiri" pitchFamily="2" charset="-78"/>
               </a:rPr>
               <a:t>تُنَاسِبُنِي لِأَنِّي أَتَكَلَّمُ ثَلَاثَ لُغَاتٍ، وَأُحِبُّ مُسَاعَدَةَ النَّاسِ مِنْ ثَقَافَاتٍ مُخْتَلِفَةٍ.</a:t>
@@ -22268,6 +22402,7 @@
                   <a:srgbClr val="1B3B6F"/>
                 </a:solidFill>
                 <a:latin typeface="Amiri" pitchFamily="2" charset="-78"/>
+                <a:ea typeface="Amiri" pitchFamily="2" charset="-78"/>
                 <a:cs typeface="Amiri" pitchFamily="2" charset="-78"/>
               </a:rPr>
               <a:t>جُمْلَةٌ: لِمَاذَا تُنَاسِبُكِ الوَظِيفَةُ؟</a:t>
@@ -22477,6 +22612,7 @@
                   <a:srgbClr val="D4AF37"/>
                 </a:solidFill>
                 <a:latin typeface="Amiri" pitchFamily="2" charset="-78"/>
+                <a:ea typeface="Amiri" pitchFamily="2" charset="-78"/>
                 <a:cs typeface="Amiri" pitchFamily="2" charset="-78"/>
               </a:rPr>
               <a:t>م</a:t>
@@ -22797,6 +22933,7 @@
                   <a:srgbClr val="8A6D1E"/>
                 </a:solidFill>
                 <a:latin typeface="Amiri" pitchFamily="2" charset="-78"/>
+                <a:ea typeface="Amiri" pitchFamily="2" charset="-78"/>
                 <a:cs typeface="Amiri" pitchFamily="2" charset="-78"/>
               </a:rPr>
               <a:t>أُسْبُوعُ خِبْرَةِ العَمَلِ</a:t>
@@ -23272,6 +23409,7 @@
                   <a:srgbClr val="1B3B6F"/>
                 </a:solidFill>
                 <a:latin typeface="Amiri" pitchFamily="2" charset="-78"/>
+                <a:ea typeface="Amiri" pitchFamily="2" charset="-78"/>
                 <a:cs typeface="Amiri" pitchFamily="2" charset="-78"/>
               </a:rPr>
               <a:t>أَنَا فِي أُسْبُوعِ خِبْرَةِ العَمَلِ فِي …</a:t>
@@ -23348,6 +23486,7 @@
                   <a:srgbClr val="1B3B6F"/>
                 </a:solidFill>
                 <a:latin typeface="Amiri" pitchFamily="2" charset="-78"/>
+                <a:ea typeface="Amiri" pitchFamily="2" charset="-78"/>
                 <a:cs typeface="Amiri" pitchFamily="2" charset="-78"/>
               </a:rPr>
               <a:t>أَعْمَلُ مِنَ … إِلَى …</a:t>
@@ -23424,6 +23563,7 @@
                   <a:srgbClr val="1B3B6F"/>
                 </a:solidFill>
                 <a:latin typeface="Amiri" pitchFamily="2" charset="-78"/>
+                <a:ea typeface="Amiri" pitchFamily="2" charset="-78"/>
                 <a:cs typeface="Amiri" pitchFamily="2" charset="-78"/>
               </a:rPr>
               <a:t>أَمْسِ نَظَّمْنَا … وَحَضَرَهَا …</a:t>
@@ -23500,6 +23640,7 @@
                   <a:srgbClr val="1B3B6F"/>
                 </a:solidFill>
                 <a:latin typeface="Amiri" pitchFamily="2" charset="-78"/>
+                <a:ea typeface="Amiri" pitchFamily="2" charset="-78"/>
                 <a:cs typeface="Amiri" pitchFamily="2" charset="-78"/>
               </a:rPr>
               <a:t>فِي المُسْتَقْبَلِ أُرِيدُ أَنْ أَعْمَلَ …</a:t>
@@ -23671,6 +23812,7 @@
                   <a:srgbClr val="D4AF37"/>
                 </a:solidFill>
                 <a:latin typeface="Amiri" pitchFamily="2" charset="-78"/>
+                <a:ea typeface="Amiri" pitchFamily="2" charset="-78"/>
                 <a:cs typeface="Amiri" pitchFamily="2" charset="-78"/>
               </a:rPr>
               <a:t>م</a:t>
@@ -23991,6 +24133,7 @@
                   <a:srgbClr val="8A6D1E"/>
                 </a:solidFill>
                 <a:latin typeface="Amiri" pitchFamily="2" charset="-78"/>
+                <a:ea typeface="Amiri" pitchFamily="2" charset="-78"/>
                 <a:cs typeface="Amiri" pitchFamily="2" charset="-78"/>
               </a:rPr>
               <a:t>نَصُّ السُّؤَالِ</a:t>
@@ -24271,6 +24414,7 @@
                   <a:srgbClr val="1B3B6F"/>
                 </a:solidFill>
                 <a:latin typeface="Amiri" pitchFamily="2" charset="-78"/>
+                <a:ea typeface="Amiri" pitchFamily="2" charset="-78"/>
                 <a:cs typeface="Amiri" pitchFamily="2" charset="-78"/>
               </a:rPr>
               <a:t>اكْتُبِي رِسَالَةً إِلَى صَدِيقَتِكِ عَنْ أُسْبُوعِ خِبْرَةِ العَمَلِ (٨٠–٩٠ كَلِمَةً).</a:t>
@@ -24412,6 +24556,7 @@
                   <a:srgbClr val="1B3B6F"/>
                 </a:solidFill>
                 <a:latin typeface="Amiri" pitchFamily="2" charset="-78"/>
+                <a:ea typeface="Amiri" pitchFamily="2" charset="-78"/>
                 <a:cs typeface="Amiri" pitchFamily="2" charset="-78"/>
               </a:rPr>
               <a:t>أَيْنَ تَعْمَلِينَ؟ وَمَا سَاعَاتُ العَمَلِ؟</a:t>
@@ -24553,6 +24698,7 @@
                   <a:srgbClr val="1B3B6F"/>
                 </a:solidFill>
                 <a:latin typeface="Amiri" pitchFamily="2" charset="-78"/>
+                <a:ea typeface="Amiri" pitchFamily="2" charset="-78"/>
                 <a:cs typeface="Amiri" pitchFamily="2" charset="-78"/>
               </a:rPr>
               <a:t>مَاذَا تَفْعَلِينَ؟ وَمَنْ زُمَلَاؤُكِ؟</a:t>
@@ -24694,6 +24840,7 @@
                   <a:srgbClr val="1B3B6F"/>
                 </a:solidFill>
                 <a:latin typeface="Amiri" pitchFamily="2" charset="-78"/>
+                <a:ea typeface="Amiri" pitchFamily="2" charset="-78"/>
                 <a:cs typeface="Amiri" pitchFamily="2" charset="-78"/>
               </a:rPr>
               <a:t>مَاذَا حَدَثَ؟ وَمَا رَأْيُكِ فِي العَمَلِ؟</a:t>
@@ -24835,6 +24982,7 @@
                   <a:srgbClr val="1B3B6F"/>
                 </a:solidFill>
                 <a:latin typeface="Amiri" pitchFamily="2" charset="-78"/>
+                <a:ea typeface="Amiri" pitchFamily="2" charset="-78"/>
                 <a:cs typeface="Amiri" pitchFamily="2" charset="-78"/>
               </a:rPr>
               <a:t>مَا خِطَطُكِ لِلْمُسْتَقْبَلِ؟ وَاسْأَلِي صَدِيقَتَكِ سُؤَالًا.</a:t>
@@ -25044,6 +25192,7 @@
                   <a:srgbClr val="D4AF37"/>
                 </a:solidFill>
                 <a:latin typeface="Amiri" pitchFamily="2" charset="-78"/>
+                <a:ea typeface="Amiri" pitchFamily="2" charset="-78"/>
                 <a:cs typeface="Amiri" pitchFamily="2" charset="-78"/>
               </a:rPr>
               <a:t>م</a:t>
@@ -25364,6 +25513,7 @@
                   <a:srgbClr val="8A6D1E"/>
                 </a:solidFill>
                 <a:latin typeface="Amiri" pitchFamily="2" charset="-78"/>
+                <a:ea typeface="Amiri" pitchFamily="2" charset="-78"/>
                 <a:cs typeface="Amiri" pitchFamily="2" charset="-78"/>
               </a:rPr>
               <a:t>قَوَالِبُ الكِتَابَةِ</a:t>
@@ -25644,6 +25794,7 @@
                   <a:srgbClr val="1B3B6F"/>
                 </a:solidFill>
                 <a:latin typeface="Amiri" pitchFamily="2" charset="-78"/>
+                <a:ea typeface="Amiri" pitchFamily="2" charset="-78"/>
                 <a:cs typeface="Amiri" pitchFamily="2" charset="-78"/>
               </a:rPr>
               <a:t>مَرْحَبًا يَا ______ ، كَيْفَ حَالُكِ؟</a:t>
@@ -25850,6 +26001,7 @@
                   <a:srgbClr val="1B3B6F"/>
                 </a:solidFill>
                 <a:latin typeface="Amiri" pitchFamily="2" charset="-78"/>
+                <a:ea typeface="Amiri" pitchFamily="2" charset="-78"/>
                 <a:cs typeface="Amiri" pitchFamily="2" charset="-78"/>
               </a:rPr>
               <a:t>أَنَا فِي أُسْبُوعِ خِبْرَةِ العَمَلِ فِي ______ . أَعْمَلُ مِنَ ______ إِلَى ______ .</a:t>
@@ -26056,6 +26208,7 @@
                   <a:srgbClr val="1B3B6F"/>
                 </a:solidFill>
                 <a:latin typeface="Amiri" pitchFamily="2" charset="-78"/>
+                <a:ea typeface="Amiri" pitchFamily="2" charset="-78"/>
                 <a:cs typeface="Amiri" pitchFamily="2" charset="-78"/>
               </a:rPr>
               <a:t>أُسَاعِدُ فِي ______ . زُمَلَائِي مِنْ ______ .</a:t>
@@ -26262,6 +26415,7 @@
                   <a:srgbClr val="1B3B6F"/>
                 </a:solidFill>
                 <a:latin typeface="Amiri" pitchFamily="2" charset="-78"/>
+                <a:ea typeface="Amiri" pitchFamily="2" charset="-78"/>
                 <a:cs typeface="Amiri" pitchFamily="2" charset="-78"/>
               </a:rPr>
               <a:t>أَمْسِ ______ . العَمَلُ ______ ، وَمَعَ ذٰلِكَ ______ .</a:t>
@@ -26468,6 +26622,7 @@
                   <a:srgbClr val="1B3B6F"/>
                 </a:solidFill>
                 <a:latin typeface="Amiri" pitchFamily="2" charset="-78"/>
+                <a:ea typeface="Amiri" pitchFamily="2" charset="-78"/>
                 <a:cs typeface="Amiri" pitchFamily="2" charset="-78"/>
               </a:rPr>
               <a:t>فِي المُسْتَقْبَلِ أُرِيدُ أَنْ ______ . وَأَنْتِ، ______ ؟</a:t>
@@ -26674,6 +26829,7 @@
                   <a:srgbClr val="1B3B6F"/>
                 </a:solidFill>
                 <a:latin typeface="Amiri" pitchFamily="2" charset="-78"/>
+                <a:ea typeface="Amiri" pitchFamily="2" charset="-78"/>
                 <a:cs typeface="Amiri" pitchFamily="2" charset="-78"/>
               </a:rPr>
               <a:t>مَعَ السَّلَامَةِ، ______</a:t>
@@ -26913,13 +27069,9 @@
     <a:fontScheme name="Office">
       <a:majorFont>
         <a:latin typeface="Calibri Light" panose="020F0302020204030204"/>
-        <a:ea typeface=""/>
-        <a:cs typeface=""/>
-        <a:font script="Jpan" typeface="游ゴシック Light"/>
-        <a:font script="Hang" typeface="맑은 고딕"/>
-        <a:font script="Hans" typeface="等线 Light"/>
-        <a:font script="Hant" typeface="新細明體"/>
-        <a:font script="Arab" typeface="Times New Roman"/>
+        <a:ea typeface="Amiri" pitchFamily="2" charset="-78"/>
+        <a:cs typeface="Amiri" pitchFamily="2" charset="-78"/>
+        <a:font script="Arab" typeface="Amiri"/>
         <a:font script="Hebr" typeface="Times New Roman"/>
         <a:font script="Thai" typeface="Angsana New"/>
         <a:font script="Ethi" typeface="Nyala"/>
@@ -26965,13 +27117,9 @@
       </a:majorFont>
       <a:minorFont>
         <a:latin typeface="Calibri" panose="020F0502020204030204"/>
-        <a:ea typeface=""/>
-        <a:cs typeface=""/>
-        <a:font script="Jpan" typeface="游ゴシック"/>
-        <a:font script="Hang" typeface="맑은 고딕"/>
-        <a:font script="Hans" typeface="等线"/>
-        <a:font script="Hant" typeface="新細明體"/>
-        <a:font script="Arab" typeface="Arial"/>
+        <a:ea typeface="Amiri" pitchFamily="2" charset="-78"/>
+        <a:cs typeface="Amiri" pitchFamily="2" charset="-78"/>
+        <a:font script="Arab" typeface="Amiri"/>
         <a:font script="Hebr" typeface="Arial"/>
         <a:font script="Thai" typeface="Cordia New"/>
         <a:font script="Ethi" typeface="Nyala"/>

--- a/Final_Revision/Exam_Practice/FR-L04_Writing_Workshop_Education_Work_and_the_International_World.pptx
+++ b/Final_Revision/Exam_Practice/FR-L04_Writing_Workshop_Education_Work_and_the_International_World.pptx
@@ -3852,7 +3852,7 @@
                 <a:solidFill>
                   <a:srgbClr val="FFFFFF"/>
                 </a:solidFill>
-                <a:latin typeface="Calibri" pitchFamily="34" charset="0"/>
+                <a:latin typeface="Amiri" pitchFamily="2" charset="-78"/>
                 <a:ea typeface="Amiri" pitchFamily="2" charset="-78"/>
                 <a:cs typeface="Amiri" pitchFamily="2" charset="-78"/>
               </a:rPr>
@@ -3918,7 +3918,7 @@
                 <a:solidFill>
                   <a:srgbClr val="FFFFFF"/>
                 </a:solidFill>
-                <a:latin typeface="Calibri" pitchFamily="34" charset="0"/>
+                <a:latin typeface="Amiri" pitchFamily="2" charset="-78"/>
                 <a:ea typeface="Amiri" pitchFamily="2" charset="-78"/>
                 <a:cs typeface="Amiri" pitchFamily="2" charset="-78"/>
               </a:rPr>
@@ -3984,7 +3984,7 @@
                 <a:solidFill>
                   <a:srgbClr val="FFFFFF"/>
                 </a:solidFill>
-                <a:latin typeface="Calibri" pitchFamily="34" charset="0"/>
+                <a:latin typeface="Amiri" pitchFamily="2" charset="-78"/>
                 <a:ea typeface="Amiri" pitchFamily="2" charset="-78"/>
                 <a:cs typeface="Amiri" pitchFamily="2" charset="-78"/>
               </a:rPr>
@@ -4050,7 +4050,7 @@
                 <a:solidFill>
                   <a:srgbClr val="FFFFFF"/>
                 </a:solidFill>
-                <a:latin typeface="Calibri" pitchFamily="34" charset="0"/>
+                <a:latin typeface="Amiri" pitchFamily="2" charset="-78"/>
                 <a:ea typeface="Amiri" pitchFamily="2" charset="-78"/>
                 <a:cs typeface="Amiri" pitchFamily="2" charset="-78"/>
               </a:rPr>
@@ -4848,7 +4848,7 @@
                 <a:solidFill>
                   <a:srgbClr val="FFFFFF"/>
                 </a:solidFill>
-                <a:latin typeface="Calibri" pitchFamily="34" charset="0"/>
+                <a:latin typeface="Amiri" pitchFamily="2" charset="-78"/>
                 <a:ea typeface="Amiri" pitchFamily="2" charset="-78"/>
                 <a:cs typeface="Amiri" pitchFamily="2" charset="-78"/>
               </a:rPr>
@@ -4914,7 +4914,7 @@
                 <a:solidFill>
                   <a:srgbClr val="FFFFFF"/>
                 </a:solidFill>
-                <a:latin typeface="Calibri" pitchFamily="34" charset="0"/>
+                <a:latin typeface="Amiri" pitchFamily="2" charset="-78"/>
                 <a:ea typeface="Amiri" pitchFamily="2" charset="-78"/>
                 <a:cs typeface="Amiri" pitchFamily="2" charset="-78"/>
               </a:rPr>
@@ -4980,7 +4980,7 @@
                 <a:solidFill>
                   <a:srgbClr val="FFFFFF"/>
                 </a:solidFill>
-                <a:latin typeface="Calibri" pitchFamily="34" charset="0"/>
+                <a:latin typeface="Amiri" pitchFamily="2" charset="-78"/>
                 <a:ea typeface="Amiri" pitchFamily="2" charset="-78"/>
                 <a:cs typeface="Amiri" pitchFamily="2" charset="-78"/>
               </a:rPr>
@@ -5046,7 +5046,7 @@
                 <a:solidFill>
                   <a:srgbClr val="FFFFFF"/>
                 </a:solidFill>
-                <a:latin typeface="Calibri" pitchFamily="34" charset="0"/>
+                <a:latin typeface="Amiri" pitchFamily="2" charset="-78"/>
                 <a:ea typeface="Amiri" pitchFamily="2" charset="-78"/>
                 <a:cs typeface="Amiri" pitchFamily="2" charset="-78"/>
               </a:rPr>
@@ -8603,7 +8603,7 @@
                 <a:solidFill>
                   <a:srgbClr val="FFFFFF"/>
                 </a:solidFill>
-                <a:latin typeface="Calibri" pitchFamily="34" charset="0"/>
+                <a:latin typeface="Amiri" pitchFamily="2" charset="-78"/>
                 <a:ea typeface="Amiri" pitchFamily="2" charset="-78"/>
                 <a:cs typeface="Amiri" pitchFamily="2" charset="-78"/>
               </a:rPr>
@@ -8669,7 +8669,7 @@
                 <a:solidFill>
                   <a:srgbClr val="FFFFFF"/>
                 </a:solidFill>
-                <a:latin typeface="Calibri" pitchFamily="34" charset="0"/>
+                <a:latin typeface="Amiri" pitchFamily="2" charset="-78"/>
                 <a:ea typeface="Amiri" pitchFamily="2" charset="-78"/>
                 <a:cs typeface="Amiri" pitchFamily="2" charset="-78"/>
               </a:rPr>
@@ -8735,7 +8735,7 @@
                 <a:solidFill>
                   <a:srgbClr val="FFFFFF"/>
                 </a:solidFill>
-                <a:latin typeface="Calibri" pitchFamily="34" charset="0"/>
+                <a:latin typeface="Amiri" pitchFamily="2" charset="-78"/>
                 <a:ea typeface="Amiri" pitchFamily="2" charset="-78"/>
                 <a:cs typeface="Amiri" pitchFamily="2" charset="-78"/>
               </a:rPr>
@@ -8801,7 +8801,7 @@
                 <a:solidFill>
                   <a:srgbClr val="FFFFFF"/>
                 </a:solidFill>
-                <a:latin typeface="Calibri" pitchFamily="34" charset="0"/>
+                <a:latin typeface="Amiri" pitchFamily="2" charset="-78"/>
                 <a:ea typeface="Amiri" pitchFamily="2" charset="-78"/>
                 <a:cs typeface="Amiri" pitchFamily="2" charset="-78"/>
               </a:rPr>
@@ -9588,7 +9588,7 @@
                 <a:solidFill>
                   <a:srgbClr val="FFFFFF"/>
                 </a:solidFill>
-                <a:latin typeface="Calibri" pitchFamily="34" charset="0"/>
+                <a:latin typeface="Amiri" pitchFamily="2" charset="-78"/>
                 <a:ea typeface="Amiri" pitchFamily="2" charset="-78"/>
                 <a:cs typeface="Amiri" pitchFamily="2" charset="-78"/>
               </a:rPr>
@@ -9654,7 +9654,7 @@
                 <a:solidFill>
                   <a:srgbClr val="FFFFFF"/>
                 </a:solidFill>
-                <a:latin typeface="Calibri" pitchFamily="34" charset="0"/>
+                <a:latin typeface="Amiri" pitchFamily="2" charset="-78"/>
                 <a:ea typeface="Amiri" pitchFamily="2" charset="-78"/>
                 <a:cs typeface="Amiri" pitchFamily="2" charset="-78"/>
               </a:rPr>
@@ -9720,7 +9720,7 @@
                 <a:solidFill>
                   <a:srgbClr val="FFFFFF"/>
                 </a:solidFill>
-                <a:latin typeface="Calibri" pitchFamily="34" charset="0"/>
+                <a:latin typeface="Amiri" pitchFamily="2" charset="-78"/>
                 <a:ea typeface="Amiri" pitchFamily="2" charset="-78"/>
                 <a:cs typeface="Amiri" pitchFamily="2" charset="-78"/>
               </a:rPr>
@@ -9786,7 +9786,7 @@
                 <a:solidFill>
                   <a:srgbClr val="FFFFFF"/>
                 </a:solidFill>
-                <a:latin typeface="Calibri" pitchFamily="34" charset="0"/>
+                <a:latin typeface="Amiri" pitchFamily="2" charset="-78"/>
                 <a:ea typeface="Amiri" pitchFamily="2" charset="-78"/>
                 <a:cs typeface="Amiri" pitchFamily="2" charset="-78"/>
               </a:rPr>
@@ -10573,7 +10573,7 @@
                 <a:solidFill>
                   <a:srgbClr val="FFFFFF"/>
                 </a:solidFill>
-                <a:latin typeface="Calibri" pitchFamily="34" charset="0"/>
+                <a:latin typeface="Amiri" pitchFamily="2" charset="-78"/>
                 <a:ea typeface="Amiri" pitchFamily="2" charset="-78"/>
                 <a:cs typeface="Amiri" pitchFamily="2" charset="-78"/>
               </a:rPr>
@@ -10639,7 +10639,7 @@
                 <a:solidFill>
                   <a:srgbClr val="FFFFFF"/>
                 </a:solidFill>
-                <a:latin typeface="Calibri" pitchFamily="34" charset="0"/>
+                <a:latin typeface="Amiri" pitchFamily="2" charset="-78"/>
                 <a:ea typeface="Amiri" pitchFamily="2" charset="-78"/>
                 <a:cs typeface="Amiri" pitchFamily="2" charset="-78"/>
               </a:rPr>
@@ -10705,7 +10705,7 @@
                 <a:solidFill>
                   <a:srgbClr val="FFFFFF"/>
                 </a:solidFill>
-                <a:latin typeface="Calibri" pitchFamily="34" charset="0"/>
+                <a:latin typeface="Amiri" pitchFamily="2" charset="-78"/>
                 <a:ea typeface="Amiri" pitchFamily="2" charset="-78"/>
                 <a:cs typeface="Amiri" pitchFamily="2" charset="-78"/>
               </a:rPr>
@@ -10771,7 +10771,7 @@
                 <a:solidFill>
                   <a:srgbClr val="FFFFFF"/>
                 </a:solidFill>
-                <a:latin typeface="Calibri" pitchFamily="34" charset="0"/>
+                <a:latin typeface="Amiri" pitchFamily="2" charset="-78"/>
                 <a:ea typeface="Amiri" pitchFamily="2" charset="-78"/>
                 <a:cs typeface="Amiri" pitchFamily="2" charset="-78"/>
               </a:rPr>
